--- a/RM/Predavanja/P1_RM-uvod_[1]-2022.pptx
+++ b/RM/Predavanja/P1_RM-uvod_[1]-2022.pptx
@@ -312,7 +312,7 @@
               <a:pPr>
                 <a:defRPr/>
               </a:pPr>
-              <a:t>10/13/2022</a:t>
+              <a:t>7/24/2025</a:t>
             </a:fld>
             <a:endParaRPr lang="en-US"/>
           </a:p>
@@ -25762,7 +25762,7 @@
               <a:buNone/>
             </a:pPr>
             <a:r>
-              <a:rPr kumimoji="0" lang="hr-HR" altLang="en-US" sz="2400">
+              <a:rPr kumimoji="0" lang="hr-HR" altLang="en-US" sz="2400" dirty="0">
                 <a:solidFill>
                   <a:schemeClr val="tx1"/>
                 </a:solidFill>
@@ -25781,13 +25781,26 @@
               <a:buNone/>
             </a:pPr>
             <a:r>
-              <a:rPr kumimoji="0" lang="hr-HR" altLang="en-US" sz="2400">
+              <a:rPr kumimoji="0" lang="hr-HR" altLang="en-US" sz="2400" dirty="0">
                 <a:solidFill>
                   <a:schemeClr val="tx1"/>
                 </a:solidFill>
               </a:rPr>
-              <a:t>6. prezentacioni</a:t>
-            </a:r>
+              <a:t>6. </a:t>
+            </a:r>
+            <a:r>
+              <a:rPr kumimoji="0" lang="hr-HR" altLang="en-US" sz="2400" dirty="0" err="1">
+                <a:solidFill>
+                  <a:schemeClr val="tx1"/>
+                </a:solidFill>
+              </a:rPr>
+              <a:t>prezentacioni</a:t>
+            </a:r>
+            <a:endParaRPr kumimoji="0" lang="hr-HR" altLang="en-US" sz="2400" dirty="0">
+              <a:solidFill>
+                <a:schemeClr val="tx1"/>
+              </a:solidFill>
+            </a:endParaRPr>
           </a:p>
           <a:p>
             <a:pPr eaLnBrk="1" hangingPunct="1">
@@ -25800,7 +25813,7 @@
               <a:buNone/>
             </a:pPr>
             <a:r>
-              <a:rPr kumimoji="0" lang="hr-HR" altLang="en-US" sz="2400">
+              <a:rPr kumimoji="0" lang="hr-HR" altLang="en-US" sz="2400" dirty="0">
                 <a:solidFill>
                   <a:schemeClr val="tx1"/>
                 </a:solidFill>
@@ -25819,7 +25832,7 @@
               <a:buNone/>
             </a:pPr>
             <a:r>
-              <a:rPr kumimoji="0" lang="hr-HR" altLang="en-US" sz="2400">
+              <a:rPr kumimoji="0" lang="hr-HR" altLang="en-US" sz="2400" dirty="0">
                 <a:solidFill>
                   <a:schemeClr val="tx1"/>
                 </a:solidFill>
@@ -25838,7 +25851,7 @@
               <a:buNone/>
             </a:pPr>
             <a:r>
-              <a:rPr kumimoji="0" lang="hr-HR" altLang="en-US" sz="2400">
+              <a:rPr kumimoji="0" lang="hr-HR" altLang="en-US" sz="2400" dirty="0">
                 <a:solidFill>
                   <a:schemeClr val="tx1"/>
                 </a:solidFill>
@@ -25857,7 +25870,7 @@
               <a:buNone/>
             </a:pPr>
             <a:r>
-              <a:rPr kumimoji="0" lang="hr-HR" altLang="en-US" sz="2400">
+              <a:rPr kumimoji="0" lang="hr-HR" altLang="en-US" sz="2400" dirty="0">
                 <a:solidFill>
                   <a:schemeClr val="tx1"/>
                 </a:solidFill>
@@ -25876,14 +25889,14 @@
               <a:buNone/>
             </a:pPr>
             <a:r>
-              <a:rPr kumimoji="0" lang="hr-HR" altLang="en-US" sz="2400">
+              <a:rPr kumimoji="0" lang="hr-HR" altLang="en-US" sz="2400" dirty="0">
                 <a:solidFill>
                   <a:schemeClr val="tx1"/>
                 </a:solidFill>
               </a:rPr>
               <a:t>1. fizički </a:t>
             </a:r>
-            <a:endParaRPr kumimoji="0" lang="en-US" altLang="en-US" sz="2400">
+            <a:endParaRPr kumimoji="0" lang="en-US" altLang="en-US" sz="2400" dirty="0">
               <a:solidFill>
                 <a:schemeClr val="tx1"/>
               </a:solidFill>
@@ -35740,8 +35753,16 @@
               <a:defRPr/>
             </a:pPr>
             <a:r>
-              <a:rPr lang="sr-Latn-CS"/>
-              <a:t>Ne razgraničava jasno koncept usluga, interfeisa i protokola</a:t>
+              <a:rPr lang="sr-Latn-CS" dirty="0"/>
+              <a:t>Ne razgraničava jasno koncept usluga, </a:t>
+            </a:r>
+            <a:r>
+              <a:rPr lang="sr-Latn-CS" dirty="0" err="1"/>
+              <a:t>interfeisa</a:t>
+            </a:r>
+            <a:r>
+              <a:rPr lang="sr-Latn-CS" dirty="0"/>
+              <a:t> i protokola</a:t>
             </a:r>
           </a:p>
           <a:p>
@@ -35749,8 +35770,16 @@
               <a:defRPr/>
             </a:pPr>
             <a:r>
-              <a:rPr lang="sr-Latn-CS"/>
-              <a:t>Dobra praksa softverskog inženjerstva zahteva razlikovanje izmedju specifikacije i realizacije </a:t>
+              <a:rPr lang="sr-Latn-CS" dirty="0"/>
+              <a:t>Dobra praksa softverskog inženjerstva zahteva razlikovanje </a:t>
+            </a:r>
+            <a:r>
+              <a:rPr lang="sr-Latn-CS" dirty="0" err="1"/>
+              <a:t>izmedju</a:t>
+            </a:r>
+            <a:r>
+              <a:rPr lang="sr-Latn-CS" dirty="0"/>
+              <a:t> specifikacije i realizacije </a:t>
             </a:r>
           </a:p>
           <a:p>
@@ -35758,17 +35787,30 @@
               <a:defRPr/>
             </a:pPr>
             <a:r>
-              <a:rPr lang="sr-Latn-CS"/>
-              <a:t>U OSI je to dobro uradjeno</a:t>
-            </a:r>
+              <a:rPr lang="sr-Latn-CS" dirty="0"/>
+              <a:t>U OSI je to dobro </a:t>
+            </a:r>
+            <a:r>
+              <a:rPr lang="sr-Latn-CS" dirty="0" err="1"/>
+              <a:t>uradjeno</a:t>
+            </a:r>
+            <a:endParaRPr lang="sr-Latn-CS" dirty="0"/>
           </a:p>
           <a:p>
             <a:pPr lvl="1" eaLnBrk="1" hangingPunct="1">
               <a:defRPr/>
             </a:pPr>
             <a:r>
-              <a:rPr lang="sr-Latn-CS"/>
-              <a:t>Kod TCP/PI traljavo</a:t>
+              <a:rPr lang="sr-Latn-CS" dirty="0"/>
+              <a:t>Kod TCP/</a:t>
+            </a:r>
+            <a:r>
+              <a:rPr lang="en-US" dirty="0"/>
+              <a:t>IP</a:t>
+            </a:r>
+            <a:r>
+              <a:rPr lang="sr-Latn-CS" dirty="0"/>
+              <a:t> traljavo</a:t>
             </a:r>
           </a:p>
           <a:p>
@@ -35776,7 +35818,7 @@
               <a:defRPr/>
             </a:pPr>
             <a:r>
-              <a:rPr lang="sr-Latn-CS"/>
+              <a:rPr lang="sr-Latn-CS" dirty="0"/>
               <a:t>TCP/IP nije od pomoći kada se projektuju mreže koje koriste nove tehnologije</a:t>
             </a:r>
           </a:p>
@@ -35785,7 +35827,7 @@
               <a:defRPr/>
             </a:pPr>
             <a:r>
-              <a:rPr lang="sr-Latn-CS"/>
+              <a:rPr lang="sr-Latn-CS" dirty="0"/>
               <a:t>TCP/IP ne razdvaja fizički i nivo veze za podatke</a:t>
             </a:r>
           </a:p>
@@ -35794,7 +35836,7 @@
               <a:defRPr/>
             </a:pPr>
             <a:r>
-              <a:rPr lang="sr-Latn-CS"/>
+              <a:rPr lang="sr-Latn-CS" dirty="0"/>
               <a:t>Ta dva sloja su potpuno različita:</a:t>
             </a:r>
           </a:p>
@@ -35803,7 +35845,7 @@
               <a:defRPr/>
             </a:pPr>
             <a:r>
-              <a:rPr lang="sr-Latn-CS"/>
+              <a:rPr lang="sr-Latn-CS" dirty="0"/>
               <a:t>Fizički se bavi svojstvima prenosnih medijuma</a:t>
             </a:r>
           </a:p>
@@ -35812,7 +35854,7 @@
               <a:defRPr/>
             </a:pPr>
             <a:r>
-              <a:rPr lang="sr-Latn-CS"/>
+              <a:rPr lang="sr-Latn-CS" dirty="0"/>
               <a:t>Nivo veze pouzdanim prenosom preko fizičkog medijuma</a:t>
             </a:r>
           </a:p>
@@ -35820,7 +35862,7 @@
             <a:pPr lvl="2" eaLnBrk="1" hangingPunct="1">
               <a:defRPr/>
             </a:pPr>
-            <a:endParaRPr lang="en-US"/>
+            <a:endParaRPr lang="en-US" dirty="0"/>
           </a:p>
         </p:txBody>
       </p:sp>
@@ -37512,7 +37554,7 @@
               <a:defRPr/>
             </a:pPr>
             <a:r>
-              <a:rPr lang="sr-Latn-CS"/>
+              <a:rPr lang="sr-Latn-CS" dirty="0"/>
               <a:t>OSI model se pokazao veoma korisnim  za razumevanje rada RM, ali njegovi protokoli nisu naišli na prihvatanje</a:t>
             </a:r>
           </a:p>
@@ -37521,7 +37563,7 @@
               <a:defRPr/>
             </a:pPr>
             <a:r>
-              <a:rPr lang="sr-Latn-CS"/>
+              <a:rPr lang="sr-Latn-CS" dirty="0"/>
               <a:t>TCP/IP model praktično ne postoji, ali se njegovi protokoli masovno koriste</a:t>
             </a:r>
           </a:p>
@@ -37530,7 +37572,7 @@
               <a:defRPr/>
             </a:pPr>
             <a:r>
-              <a:rPr lang="sr-Latn-CS"/>
+              <a:rPr lang="sr-Latn-CS" dirty="0"/>
               <a:t>Koristićemo hibridni model u proučavanju RM:</a:t>
             </a:r>
           </a:p>
@@ -37539,7 +37581,7 @@
               <a:defRPr/>
             </a:pPr>
             <a:r>
-              <a:rPr lang="sr-Latn-CS"/>
+              <a:rPr lang="sr-Latn-CS" dirty="0"/>
               <a:t>5. aplikativni</a:t>
             </a:r>
           </a:p>
@@ -37548,7 +37590,7 @@
               <a:defRPr/>
             </a:pPr>
             <a:r>
-              <a:rPr lang="sr-Latn-CS"/>
+              <a:rPr lang="sr-Latn-CS" dirty="0"/>
               <a:t>4. transportni</a:t>
             </a:r>
           </a:p>
@@ -37557,7 +37599,7 @@
               <a:defRPr/>
             </a:pPr>
             <a:r>
-              <a:rPr lang="sr-Latn-CS"/>
+              <a:rPr lang="sr-Latn-CS" dirty="0"/>
               <a:t>3. mrežni</a:t>
             </a:r>
           </a:p>
@@ -37566,7 +37608,7 @@
               <a:defRPr/>
             </a:pPr>
             <a:r>
-              <a:rPr lang="sr-Latn-CS"/>
+              <a:rPr lang="sr-Latn-CS" dirty="0"/>
               <a:t>2. nivo veze</a:t>
             </a:r>
           </a:p>
@@ -37575,10 +37617,10 @@
               <a:defRPr/>
             </a:pPr>
             <a:r>
-              <a:rPr lang="sr-Latn-CS"/>
+              <a:rPr lang="sr-Latn-CS" dirty="0"/>
               <a:t>1. fizički nivo</a:t>
             </a:r>
-            <a:endParaRPr lang="en-US"/>
+            <a:endParaRPr lang="en-US" dirty="0"/>
           </a:p>
         </p:txBody>
       </p:sp>
